--- a/RELEASE/Yuru Yuri Character Relationship Chart.pptx
+++ b/RELEASE/Yuru Yuri Character Relationship Chart.pptx
@@ -113,7 +113,7 @@
 </file>
 
 <file path=ppt/slideLayouts/slideLayout1.xml><?xml version="1.0" encoding="utf-8"?>
-<p:sldLayout xmlns:a="http://schemas.openxmlformats.org/drawingml/2006/main" xmlns:r="http://schemas.openxmlformats.org/officeDocument/2006/relationships" xmlns:p="http://schemas.openxmlformats.org/presentationml/2006/main" type="title" preserve="1">
+<p:sldLayout xmlns:a="http://schemas.openxmlformats.org/drawingml/2006/main" xmlns:r="http://schemas.openxmlformats.org/officeDocument/2006/relationships" xmlns:p="http://schemas.openxmlformats.org/presentationml/2006/main" preserve="1" userDrawn="1">
   <p:cSld name="Title Slide">
     <p:spTree>
       <p:nvGrpSpPr>
@@ -129,2284 +129,10 @@
           <a:chExt cx="0" cy="0"/>
         </a:xfrm>
       </p:grpSpPr>
-      <p:sp>
-        <p:nvSpPr>
-          <p:cNvPr id="2" name="Title 1"/>
-          <p:cNvSpPr>
-            <a:spLocks noGrp="1"/>
-          </p:cNvSpPr>
-          <p:nvPr>
-            <p:ph type="ctrTitle"/>
-          </p:nvPr>
-        </p:nvSpPr>
-        <p:spPr>
-          <a:xfrm>
-            <a:off x="2250083" y="1472842"/>
-            <a:ext cx="13500497" cy="3133172"/>
-          </a:xfrm>
-        </p:spPr>
-        <p:txBody>
-          <a:bodyPr anchor="b"/>
-          <a:lstStyle>
-            <a:lvl1pPr algn="ctr">
-              <a:defRPr sz="7874"/>
-            </a:lvl1pPr>
-          </a:lstStyle>
-          <a:p>
-            <a:r>
-              <a:rPr lang="en-US"/>
-              <a:t>Click to edit Master title style</a:t>
-            </a:r>
-            <a:endParaRPr lang="en-US" dirty="0"/>
-          </a:p>
-        </p:txBody>
-      </p:sp>
-      <p:sp>
-        <p:nvSpPr>
-          <p:cNvPr id="3" name="Subtitle 2"/>
-          <p:cNvSpPr>
-            <a:spLocks noGrp="1"/>
-          </p:cNvSpPr>
-          <p:nvPr>
-            <p:ph type="subTitle" idx="1"/>
-          </p:nvPr>
-        </p:nvSpPr>
-        <p:spPr>
-          <a:xfrm>
-            <a:off x="2250083" y="4726842"/>
-            <a:ext cx="13500497" cy="2172804"/>
-          </a:xfrm>
-        </p:spPr>
-        <p:txBody>
-          <a:bodyPr/>
-          <a:lstStyle>
-            <a:lvl1pPr marL="0" indent="0" algn="ctr">
-              <a:buNone/>
-              <a:defRPr sz="3150"/>
-            </a:lvl1pPr>
-            <a:lvl2pPr marL="599984" indent="0" algn="ctr">
-              <a:buNone/>
-              <a:defRPr sz="2625"/>
-            </a:lvl2pPr>
-            <a:lvl3pPr marL="1199967" indent="0" algn="ctr">
-              <a:buNone/>
-              <a:defRPr sz="2362"/>
-            </a:lvl3pPr>
-            <a:lvl4pPr marL="1799951" indent="0" algn="ctr">
-              <a:buNone/>
-              <a:defRPr sz="2100"/>
-            </a:lvl4pPr>
-            <a:lvl5pPr marL="2399934" indent="0" algn="ctr">
-              <a:buNone/>
-              <a:defRPr sz="2100"/>
-            </a:lvl5pPr>
-            <a:lvl6pPr marL="2999918" indent="0" algn="ctr">
-              <a:buNone/>
-              <a:defRPr sz="2100"/>
-            </a:lvl6pPr>
-            <a:lvl7pPr marL="3599901" indent="0" algn="ctr">
-              <a:buNone/>
-              <a:defRPr sz="2100"/>
-            </a:lvl7pPr>
-            <a:lvl8pPr marL="4199885" indent="0" algn="ctr">
-              <a:buNone/>
-              <a:defRPr sz="2100"/>
-            </a:lvl8pPr>
-            <a:lvl9pPr marL="4799868" indent="0" algn="ctr">
-              <a:buNone/>
-              <a:defRPr sz="2100"/>
-            </a:lvl9pPr>
-          </a:lstStyle>
-          <a:p>
-            <a:r>
-              <a:rPr lang="en-US"/>
-              <a:t>Click to edit Master subtitle style</a:t>
-            </a:r>
-            <a:endParaRPr lang="en-US" dirty="0"/>
-          </a:p>
-        </p:txBody>
-      </p:sp>
-      <p:sp>
-        <p:nvSpPr>
-          <p:cNvPr id="4" name="Date Placeholder 3"/>
-          <p:cNvSpPr>
-            <a:spLocks noGrp="1"/>
-          </p:cNvSpPr>
-          <p:nvPr>
-            <p:ph type="dt" sz="half" idx="10"/>
-          </p:nvPr>
-        </p:nvSpPr>
-        <p:spPr/>
-        <p:txBody>
-          <a:bodyPr/>
-          <a:lstStyle/>
-          <a:p>
-            <a:fld id="{F3006E53-7520-4BC9-B0E2-EF98D06B1E4C}" type="datetimeFigureOut">
-              <a:rPr lang="en-US" smtClean="0"/>
-              <a:t>10/17/20 (Sat)</a:t>
-            </a:fld>
-            <a:endParaRPr lang="en-US"/>
-          </a:p>
-        </p:txBody>
-      </p:sp>
-      <p:sp>
-        <p:nvSpPr>
-          <p:cNvPr id="5" name="Footer Placeholder 4"/>
-          <p:cNvSpPr>
-            <a:spLocks noGrp="1"/>
-          </p:cNvSpPr>
-          <p:nvPr>
-            <p:ph type="ftr" sz="quarter" idx="11"/>
-          </p:nvPr>
-        </p:nvSpPr>
-        <p:spPr/>
-        <p:txBody>
-          <a:bodyPr/>
-          <a:lstStyle/>
-          <a:p>
-            <a:endParaRPr lang="en-US"/>
-          </a:p>
-        </p:txBody>
-      </p:sp>
-      <p:sp>
-        <p:nvSpPr>
-          <p:cNvPr id="6" name="Slide Number Placeholder 5"/>
-          <p:cNvSpPr>
-            <a:spLocks noGrp="1"/>
-          </p:cNvSpPr>
-          <p:nvPr>
-            <p:ph type="sldNum" sz="quarter" idx="12"/>
-          </p:nvPr>
-        </p:nvSpPr>
-        <p:spPr/>
-        <p:txBody>
-          <a:bodyPr/>
-          <a:lstStyle/>
-          <a:p>
-            <a:fld id="{DD68DF89-2A9F-4DAC-8D1F-F96BD4021E4B}" type="slidenum">
-              <a:rPr lang="en-US" smtClean="0"/>
-              <a:t>‹#›</a:t>
-            </a:fld>
-            <a:endParaRPr lang="en-US"/>
-          </a:p>
-        </p:txBody>
-      </p:sp>
     </p:spTree>
     <p:extLst>
       <p:ext uri="{BB962C8B-B14F-4D97-AF65-F5344CB8AC3E}">
         <p14:creationId xmlns:p14="http://schemas.microsoft.com/office/powerpoint/2010/main" val="2694775090"/>
-      </p:ext>
-    </p:extLst>
-  </p:cSld>
-  <p:clrMapOvr>
-    <a:masterClrMapping/>
-  </p:clrMapOvr>
-</p:sldLayout>
-</file>
-
-<file path=ppt/slideLayouts/slideLayout10.xml><?xml version="1.0" encoding="utf-8"?>
-<p:sldLayout xmlns:a="http://schemas.openxmlformats.org/drawingml/2006/main" xmlns:r="http://schemas.openxmlformats.org/officeDocument/2006/relationships" xmlns:p="http://schemas.openxmlformats.org/presentationml/2006/main" type="vertTx" preserve="1">
-  <p:cSld name="Title and Vertical Text">
-    <p:spTree>
-      <p:nvGrpSpPr>
-        <p:cNvPr id="1" name=""/>
-        <p:cNvGrpSpPr/>
-        <p:nvPr/>
-      </p:nvGrpSpPr>
-      <p:grpSpPr>
-        <a:xfrm>
-          <a:off x="0" y="0"/>
-          <a:ext cx="0" cy="0"/>
-          <a:chOff x="0" y="0"/>
-          <a:chExt cx="0" cy="0"/>
-        </a:xfrm>
-      </p:grpSpPr>
-      <p:sp>
-        <p:nvSpPr>
-          <p:cNvPr id="2" name="Title 1"/>
-          <p:cNvSpPr>
-            <a:spLocks noGrp="1"/>
-          </p:cNvSpPr>
-          <p:nvPr>
-            <p:ph type="title"/>
-          </p:nvPr>
-        </p:nvSpPr>
-        <p:spPr/>
-        <p:txBody>
-          <a:bodyPr/>
-          <a:lstStyle/>
-          <a:p>
-            <a:r>
-              <a:rPr lang="en-US"/>
-              <a:t>Click to edit Master title style</a:t>
-            </a:r>
-            <a:endParaRPr lang="en-US" dirty="0"/>
-          </a:p>
-        </p:txBody>
-      </p:sp>
-      <p:sp>
-        <p:nvSpPr>
-          <p:cNvPr id="3" name="Vertical Text Placeholder 2"/>
-          <p:cNvSpPr>
-            <a:spLocks noGrp="1"/>
-          </p:cNvSpPr>
-          <p:nvPr>
-            <p:ph type="body" orient="vert" idx="1"/>
-          </p:nvPr>
-        </p:nvSpPr>
-        <p:spPr/>
-        <p:txBody>
-          <a:bodyPr vert="eaVert"/>
-          <a:lstStyle/>
-          <a:p>
-            <a:pPr lvl="0"/>
-            <a:r>
-              <a:rPr lang="en-US"/>
-              <a:t>Click to edit Master text styles</a:t>
-            </a:r>
-          </a:p>
-          <a:p>
-            <a:pPr lvl="1"/>
-            <a:r>
-              <a:rPr lang="en-US"/>
-              <a:t>Second level</a:t>
-            </a:r>
-          </a:p>
-          <a:p>
-            <a:pPr lvl="2"/>
-            <a:r>
-              <a:rPr lang="en-US"/>
-              <a:t>Third level</a:t>
-            </a:r>
-          </a:p>
-          <a:p>
-            <a:pPr lvl="3"/>
-            <a:r>
-              <a:rPr lang="en-US"/>
-              <a:t>Fourth level</a:t>
-            </a:r>
-          </a:p>
-          <a:p>
-            <a:pPr lvl="4"/>
-            <a:r>
-              <a:rPr lang="en-US"/>
-              <a:t>Fifth level</a:t>
-            </a:r>
-            <a:endParaRPr lang="en-US" dirty="0"/>
-          </a:p>
-        </p:txBody>
-      </p:sp>
-      <p:sp>
-        <p:nvSpPr>
-          <p:cNvPr id="4" name="Date Placeholder 3"/>
-          <p:cNvSpPr>
-            <a:spLocks noGrp="1"/>
-          </p:cNvSpPr>
-          <p:nvPr>
-            <p:ph type="dt" sz="half" idx="10"/>
-          </p:nvPr>
-        </p:nvSpPr>
-        <p:spPr/>
-        <p:txBody>
-          <a:bodyPr/>
-          <a:lstStyle/>
-          <a:p>
-            <a:fld id="{F3006E53-7520-4BC9-B0E2-EF98D06B1E4C}" type="datetimeFigureOut">
-              <a:rPr lang="en-US" smtClean="0"/>
-              <a:t>10/17/20 (Sat)</a:t>
-            </a:fld>
-            <a:endParaRPr lang="en-US"/>
-          </a:p>
-        </p:txBody>
-      </p:sp>
-      <p:sp>
-        <p:nvSpPr>
-          <p:cNvPr id="5" name="Footer Placeholder 4"/>
-          <p:cNvSpPr>
-            <a:spLocks noGrp="1"/>
-          </p:cNvSpPr>
-          <p:nvPr>
-            <p:ph type="ftr" sz="quarter" idx="11"/>
-          </p:nvPr>
-        </p:nvSpPr>
-        <p:spPr/>
-        <p:txBody>
-          <a:bodyPr/>
-          <a:lstStyle/>
-          <a:p>
-            <a:endParaRPr lang="en-US"/>
-          </a:p>
-        </p:txBody>
-      </p:sp>
-      <p:sp>
-        <p:nvSpPr>
-          <p:cNvPr id="6" name="Slide Number Placeholder 5"/>
-          <p:cNvSpPr>
-            <a:spLocks noGrp="1"/>
-          </p:cNvSpPr>
-          <p:nvPr>
-            <p:ph type="sldNum" sz="quarter" idx="12"/>
-          </p:nvPr>
-        </p:nvSpPr>
-        <p:spPr/>
-        <p:txBody>
-          <a:bodyPr/>
-          <a:lstStyle/>
-          <a:p>
-            <a:fld id="{DD68DF89-2A9F-4DAC-8D1F-F96BD4021E4B}" type="slidenum">
-              <a:rPr lang="en-US" smtClean="0"/>
-              <a:t>‹#›</a:t>
-            </a:fld>
-            <a:endParaRPr lang="en-US"/>
-          </a:p>
-        </p:txBody>
-      </p:sp>
-    </p:spTree>
-    <p:extLst>
-      <p:ext uri="{BB962C8B-B14F-4D97-AF65-F5344CB8AC3E}">
-        <p14:creationId xmlns:p14="http://schemas.microsoft.com/office/powerpoint/2010/main" val="3616724723"/>
-      </p:ext>
-    </p:extLst>
-  </p:cSld>
-  <p:clrMapOvr>
-    <a:masterClrMapping/>
-  </p:clrMapOvr>
-</p:sldLayout>
-</file>
-
-<file path=ppt/slideLayouts/slideLayout11.xml><?xml version="1.0" encoding="utf-8"?>
-<p:sldLayout xmlns:a="http://schemas.openxmlformats.org/drawingml/2006/main" xmlns:r="http://schemas.openxmlformats.org/officeDocument/2006/relationships" xmlns:p="http://schemas.openxmlformats.org/presentationml/2006/main" type="vertTitleAndTx" preserve="1">
-  <p:cSld name="Vertical Title and Text">
-    <p:spTree>
-      <p:nvGrpSpPr>
-        <p:cNvPr id="1" name=""/>
-        <p:cNvGrpSpPr/>
-        <p:nvPr/>
-      </p:nvGrpSpPr>
-      <p:grpSpPr>
-        <a:xfrm>
-          <a:off x="0" y="0"/>
-          <a:ext cx="0" cy="0"/>
-          <a:chOff x="0" y="0"/>
-          <a:chExt cx="0" cy="0"/>
-        </a:xfrm>
-      </p:grpSpPr>
-      <p:sp>
-        <p:nvSpPr>
-          <p:cNvPr id="2" name="Vertical Title 1"/>
-          <p:cNvSpPr>
-            <a:spLocks noGrp="1"/>
-          </p:cNvSpPr>
-          <p:nvPr>
-            <p:ph type="title" orient="vert"/>
-          </p:nvPr>
-        </p:nvSpPr>
-        <p:spPr>
-          <a:xfrm>
-            <a:off x="12881724" y="479142"/>
-            <a:ext cx="3881393" cy="7626692"/>
-          </a:xfrm>
-        </p:spPr>
-        <p:txBody>
-          <a:bodyPr vert="eaVert"/>
-          <a:lstStyle/>
-          <a:p>
-            <a:r>
-              <a:rPr lang="en-US"/>
-              <a:t>Click to edit Master title style</a:t>
-            </a:r>
-            <a:endParaRPr lang="en-US" dirty="0"/>
-          </a:p>
-        </p:txBody>
-      </p:sp>
-      <p:sp>
-        <p:nvSpPr>
-          <p:cNvPr id="3" name="Vertical Text Placeholder 2"/>
-          <p:cNvSpPr>
-            <a:spLocks noGrp="1"/>
-          </p:cNvSpPr>
-          <p:nvPr>
-            <p:ph type="body" orient="vert" idx="1"/>
-          </p:nvPr>
-        </p:nvSpPr>
-        <p:spPr>
-          <a:xfrm>
-            <a:off x="1237545" y="479142"/>
-            <a:ext cx="11419171" cy="7626692"/>
-          </a:xfrm>
-        </p:spPr>
-        <p:txBody>
-          <a:bodyPr vert="eaVert"/>
-          <a:lstStyle/>
-          <a:p>
-            <a:pPr lvl="0"/>
-            <a:r>
-              <a:rPr lang="en-US"/>
-              <a:t>Click to edit Master text styles</a:t>
-            </a:r>
-          </a:p>
-          <a:p>
-            <a:pPr lvl="1"/>
-            <a:r>
-              <a:rPr lang="en-US"/>
-              <a:t>Second level</a:t>
-            </a:r>
-          </a:p>
-          <a:p>
-            <a:pPr lvl="2"/>
-            <a:r>
-              <a:rPr lang="en-US"/>
-              <a:t>Third level</a:t>
-            </a:r>
-          </a:p>
-          <a:p>
-            <a:pPr lvl="3"/>
-            <a:r>
-              <a:rPr lang="en-US"/>
-              <a:t>Fourth level</a:t>
-            </a:r>
-          </a:p>
-          <a:p>
-            <a:pPr lvl="4"/>
-            <a:r>
-              <a:rPr lang="en-US"/>
-              <a:t>Fifth level</a:t>
-            </a:r>
-            <a:endParaRPr lang="en-US" dirty="0"/>
-          </a:p>
-        </p:txBody>
-      </p:sp>
-      <p:sp>
-        <p:nvSpPr>
-          <p:cNvPr id="4" name="Date Placeholder 3"/>
-          <p:cNvSpPr>
-            <a:spLocks noGrp="1"/>
-          </p:cNvSpPr>
-          <p:nvPr>
-            <p:ph type="dt" sz="half" idx="10"/>
-          </p:nvPr>
-        </p:nvSpPr>
-        <p:spPr/>
-        <p:txBody>
-          <a:bodyPr/>
-          <a:lstStyle/>
-          <a:p>
-            <a:fld id="{F3006E53-7520-4BC9-B0E2-EF98D06B1E4C}" type="datetimeFigureOut">
-              <a:rPr lang="en-US" smtClean="0"/>
-              <a:t>10/17/20 (Sat)</a:t>
-            </a:fld>
-            <a:endParaRPr lang="en-US"/>
-          </a:p>
-        </p:txBody>
-      </p:sp>
-      <p:sp>
-        <p:nvSpPr>
-          <p:cNvPr id="5" name="Footer Placeholder 4"/>
-          <p:cNvSpPr>
-            <a:spLocks noGrp="1"/>
-          </p:cNvSpPr>
-          <p:nvPr>
-            <p:ph type="ftr" sz="quarter" idx="11"/>
-          </p:nvPr>
-        </p:nvSpPr>
-        <p:spPr/>
-        <p:txBody>
-          <a:bodyPr/>
-          <a:lstStyle/>
-          <a:p>
-            <a:endParaRPr lang="en-US"/>
-          </a:p>
-        </p:txBody>
-      </p:sp>
-      <p:sp>
-        <p:nvSpPr>
-          <p:cNvPr id="6" name="Slide Number Placeholder 5"/>
-          <p:cNvSpPr>
-            <a:spLocks noGrp="1"/>
-          </p:cNvSpPr>
-          <p:nvPr>
-            <p:ph type="sldNum" sz="quarter" idx="12"/>
-          </p:nvPr>
-        </p:nvSpPr>
-        <p:spPr/>
-        <p:txBody>
-          <a:bodyPr/>
-          <a:lstStyle/>
-          <a:p>
-            <a:fld id="{DD68DF89-2A9F-4DAC-8D1F-F96BD4021E4B}" type="slidenum">
-              <a:rPr lang="en-US" smtClean="0"/>
-              <a:t>‹#›</a:t>
-            </a:fld>
-            <a:endParaRPr lang="en-US"/>
-          </a:p>
-        </p:txBody>
-      </p:sp>
-    </p:spTree>
-    <p:extLst>
-      <p:ext uri="{BB962C8B-B14F-4D97-AF65-F5344CB8AC3E}">
-        <p14:creationId xmlns:p14="http://schemas.microsoft.com/office/powerpoint/2010/main" val="1341856644"/>
-      </p:ext>
-    </p:extLst>
-  </p:cSld>
-  <p:clrMapOvr>
-    <a:masterClrMapping/>
-  </p:clrMapOvr>
-</p:sldLayout>
-</file>
-
-<file path=ppt/slideLayouts/slideLayout2.xml><?xml version="1.0" encoding="utf-8"?>
-<p:sldLayout xmlns:a="http://schemas.openxmlformats.org/drawingml/2006/main" xmlns:r="http://schemas.openxmlformats.org/officeDocument/2006/relationships" xmlns:p="http://schemas.openxmlformats.org/presentationml/2006/main" type="obj" preserve="1">
-  <p:cSld name="Title and Content">
-    <p:spTree>
-      <p:nvGrpSpPr>
-        <p:cNvPr id="1" name=""/>
-        <p:cNvGrpSpPr/>
-        <p:nvPr/>
-      </p:nvGrpSpPr>
-      <p:grpSpPr>
-        <a:xfrm>
-          <a:off x="0" y="0"/>
-          <a:ext cx="0" cy="0"/>
-          <a:chOff x="0" y="0"/>
-          <a:chExt cx="0" cy="0"/>
-        </a:xfrm>
-      </p:grpSpPr>
-      <p:sp>
-        <p:nvSpPr>
-          <p:cNvPr id="2" name="Title 1"/>
-          <p:cNvSpPr>
-            <a:spLocks noGrp="1"/>
-          </p:cNvSpPr>
-          <p:nvPr>
-            <p:ph type="title"/>
-          </p:nvPr>
-        </p:nvSpPr>
-        <p:spPr/>
-        <p:txBody>
-          <a:bodyPr/>
-          <a:lstStyle/>
-          <a:p>
-            <a:r>
-              <a:rPr lang="en-US"/>
-              <a:t>Click to edit Master title style</a:t>
-            </a:r>
-            <a:endParaRPr lang="en-US" dirty="0"/>
-          </a:p>
-        </p:txBody>
-      </p:sp>
-      <p:sp>
-        <p:nvSpPr>
-          <p:cNvPr id="3" name="Content Placeholder 2"/>
-          <p:cNvSpPr>
-            <a:spLocks noGrp="1"/>
-          </p:cNvSpPr>
-          <p:nvPr>
-            <p:ph idx="1"/>
-          </p:nvPr>
-        </p:nvSpPr>
-        <p:spPr/>
-        <p:txBody>
-          <a:bodyPr/>
-          <a:lstStyle/>
-          <a:p>
-            <a:pPr lvl="0"/>
-            <a:r>
-              <a:rPr lang="en-US"/>
-              <a:t>Click to edit Master text styles</a:t>
-            </a:r>
-          </a:p>
-          <a:p>
-            <a:pPr lvl="1"/>
-            <a:r>
-              <a:rPr lang="en-US"/>
-              <a:t>Second level</a:t>
-            </a:r>
-          </a:p>
-          <a:p>
-            <a:pPr lvl="2"/>
-            <a:r>
-              <a:rPr lang="en-US"/>
-              <a:t>Third level</a:t>
-            </a:r>
-          </a:p>
-          <a:p>
-            <a:pPr lvl="3"/>
-            <a:r>
-              <a:rPr lang="en-US"/>
-              <a:t>Fourth level</a:t>
-            </a:r>
-          </a:p>
-          <a:p>
-            <a:pPr lvl="4"/>
-            <a:r>
-              <a:rPr lang="en-US"/>
-              <a:t>Fifth level</a:t>
-            </a:r>
-            <a:endParaRPr lang="en-US" dirty="0"/>
-          </a:p>
-        </p:txBody>
-      </p:sp>
-      <p:sp>
-        <p:nvSpPr>
-          <p:cNvPr id="4" name="Date Placeholder 3"/>
-          <p:cNvSpPr>
-            <a:spLocks noGrp="1"/>
-          </p:cNvSpPr>
-          <p:nvPr>
-            <p:ph type="dt" sz="half" idx="10"/>
-          </p:nvPr>
-        </p:nvSpPr>
-        <p:spPr/>
-        <p:txBody>
-          <a:bodyPr/>
-          <a:lstStyle/>
-          <a:p>
-            <a:fld id="{F3006E53-7520-4BC9-B0E2-EF98D06B1E4C}" type="datetimeFigureOut">
-              <a:rPr lang="en-US" smtClean="0"/>
-              <a:t>10/17/20 (Sat)</a:t>
-            </a:fld>
-            <a:endParaRPr lang="en-US"/>
-          </a:p>
-        </p:txBody>
-      </p:sp>
-      <p:sp>
-        <p:nvSpPr>
-          <p:cNvPr id="5" name="Footer Placeholder 4"/>
-          <p:cNvSpPr>
-            <a:spLocks noGrp="1"/>
-          </p:cNvSpPr>
-          <p:nvPr>
-            <p:ph type="ftr" sz="quarter" idx="11"/>
-          </p:nvPr>
-        </p:nvSpPr>
-        <p:spPr/>
-        <p:txBody>
-          <a:bodyPr/>
-          <a:lstStyle/>
-          <a:p>
-            <a:endParaRPr lang="en-US"/>
-          </a:p>
-        </p:txBody>
-      </p:sp>
-      <p:sp>
-        <p:nvSpPr>
-          <p:cNvPr id="6" name="Slide Number Placeholder 5"/>
-          <p:cNvSpPr>
-            <a:spLocks noGrp="1"/>
-          </p:cNvSpPr>
-          <p:nvPr>
-            <p:ph type="sldNum" sz="quarter" idx="12"/>
-          </p:nvPr>
-        </p:nvSpPr>
-        <p:spPr/>
-        <p:txBody>
-          <a:bodyPr/>
-          <a:lstStyle/>
-          <a:p>
-            <a:fld id="{DD68DF89-2A9F-4DAC-8D1F-F96BD4021E4B}" type="slidenum">
-              <a:rPr lang="en-US" smtClean="0"/>
-              <a:t>‹#›</a:t>
-            </a:fld>
-            <a:endParaRPr lang="en-US"/>
-          </a:p>
-        </p:txBody>
-      </p:sp>
-    </p:spTree>
-    <p:extLst>
-      <p:ext uri="{BB962C8B-B14F-4D97-AF65-F5344CB8AC3E}">
-        <p14:creationId xmlns:p14="http://schemas.microsoft.com/office/powerpoint/2010/main" val="1789810045"/>
-      </p:ext>
-    </p:extLst>
-  </p:cSld>
-  <p:clrMapOvr>
-    <a:masterClrMapping/>
-  </p:clrMapOvr>
-</p:sldLayout>
-</file>
-
-<file path=ppt/slideLayouts/slideLayout3.xml><?xml version="1.0" encoding="utf-8"?>
-<p:sldLayout xmlns:a="http://schemas.openxmlformats.org/drawingml/2006/main" xmlns:r="http://schemas.openxmlformats.org/officeDocument/2006/relationships" xmlns:p="http://schemas.openxmlformats.org/presentationml/2006/main" type="secHead" preserve="1">
-  <p:cSld name="Section Header">
-    <p:spTree>
-      <p:nvGrpSpPr>
-        <p:cNvPr id="1" name=""/>
-        <p:cNvGrpSpPr/>
-        <p:nvPr/>
-      </p:nvGrpSpPr>
-      <p:grpSpPr>
-        <a:xfrm>
-          <a:off x="0" y="0"/>
-          <a:ext cx="0" cy="0"/>
-          <a:chOff x="0" y="0"/>
-          <a:chExt cx="0" cy="0"/>
-        </a:xfrm>
-      </p:grpSpPr>
-      <p:sp>
-        <p:nvSpPr>
-          <p:cNvPr id="2" name="Title 1"/>
-          <p:cNvSpPr>
-            <a:spLocks noGrp="1"/>
-          </p:cNvSpPr>
-          <p:nvPr>
-            <p:ph type="title"/>
-          </p:nvPr>
-        </p:nvSpPr>
-        <p:spPr>
-          <a:xfrm>
-            <a:off x="1228170" y="2243636"/>
-            <a:ext cx="15525572" cy="3743557"/>
-          </a:xfrm>
-        </p:spPr>
-        <p:txBody>
-          <a:bodyPr anchor="b"/>
-          <a:lstStyle>
-            <a:lvl1pPr>
-              <a:defRPr sz="7874"/>
-            </a:lvl1pPr>
-          </a:lstStyle>
-          <a:p>
-            <a:r>
-              <a:rPr lang="en-US"/>
-              <a:t>Click to edit Master title style</a:t>
-            </a:r>
-            <a:endParaRPr lang="en-US" dirty="0"/>
-          </a:p>
-        </p:txBody>
-      </p:sp>
-      <p:sp>
-        <p:nvSpPr>
-          <p:cNvPr id="3" name="Text Placeholder 2"/>
-          <p:cNvSpPr>
-            <a:spLocks noGrp="1"/>
-          </p:cNvSpPr>
-          <p:nvPr>
-            <p:ph type="body" idx="1"/>
-          </p:nvPr>
-        </p:nvSpPr>
-        <p:spPr>
-          <a:xfrm>
-            <a:off x="1228170" y="6022609"/>
-            <a:ext cx="15525572" cy="1968648"/>
-          </a:xfrm>
-        </p:spPr>
-        <p:txBody>
-          <a:bodyPr/>
-          <a:lstStyle>
-            <a:lvl1pPr marL="0" indent="0">
-              <a:buNone/>
-              <a:defRPr sz="3150">
-                <a:solidFill>
-                  <a:schemeClr val="tx1">
-                    <a:tint val="75000"/>
-                  </a:schemeClr>
-                </a:solidFill>
-              </a:defRPr>
-            </a:lvl1pPr>
-            <a:lvl2pPr marL="599984" indent="0">
-              <a:buNone/>
-              <a:defRPr sz="2625">
-                <a:solidFill>
-                  <a:schemeClr val="tx1">
-                    <a:tint val="75000"/>
-                  </a:schemeClr>
-                </a:solidFill>
-              </a:defRPr>
-            </a:lvl2pPr>
-            <a:lvl3pPr marL="1199967" indent="0">
-              <a:buNone/>
-              <a:defRPr sz="2362">
-                <a:solidFill>
-                  <a:schemeClr val="tx1">
-                    <a:tint val="75000"/>
-                  </a:schemeClr>
-                </a:solidFill>
-              </a:defRPr>
-            </a:lvl3pPr>
-            <a:lvl4pPr marL="1799951" indent="0">
-              <a:buNone/>
-              <a:defRPr sz="2100">
-                <a:solidFill>
-                  <a:schemeClr val="tx1">
-                    <a:tint val="75000"/>
-                  </a:schemeClr>
-                </a:solidFill>
-              </a:defRPr>
-            </a:lvl4pPr>
-            <a:lvl5pPr marL="2399934" indent="0">
-              <a:buNone/>
-              <a:defRPr sz="2100">
-                <a:solidFill>
-                  <a:schemeClr val="tx1">
-                    <a:tint val="75000"/>
-                  </a:schemeClr>
-                </a:solidFill>
-              </a:defRPr>
-            </a:lvl5pPr>
-            <a:lvl6pPr marL="2999918" indent="0">
-              <a:buNone/>
-              <a:defRPr sz="2100">
-                <a:solidFill>
-                  <a:schemeClr val="tx1">
-                    <a:tint val="75000"/>
-                  </a:schemeClr>
-                </a:solidFill>
-              </a:defRPr>
-            </a:lvl6pPr>
-            <a:lvl7pPr marL="3599901" indent="0">
-              <a:buNone/>
-              <a:defRPr sz="2100">
-                <a:solidFill>
-                  <a:schemeClr val="tx1">
-                    <a:tint val="75000"/>
-                  </a:schemeClr>
-                </a:solidFill>
-              </a:defRPr>
-            </a:lvl7pPr>
-            <a:lvl8pPr marL="4199885" indent="0">
-              <a:buNone/>
-              <a:defRPr sz="2100">
-                <a:solidFill>
-                  <a:schemeClr val="tx1">
-                    <a:tint val="75000"/>
-                  </a:schemeClr>
-                </a:solidFill>
-              </a:defRPr>
-            </a:lvl8pPr>
-            <a:lvl9pPr marL="4799868" indent="0">
-              <a:buNone/>
-              <a:defRPr sz="2100">
-                <a:solidFill>
-                  <a:schemeClr val="tx1">
-                    <a:tint val="75000"/>
-                  </a:schemeClr>
-                </a:solidFill>
-              </a:defRPr>
-            </a:lvl9pPr>
-          </a:lstStyle>
-          <a:p>
-            <a:pPr lvl="0"/>
-            <a:r>
-              <a:rPr lang="en-US"/>
-              <a:t>Click to edit Master text styles</a:t>
-            </a:r>
-          </a:p>
-        </p:txBody>
-      </p:sp>
-      <p:sp>
-        <p:nvSpPr>
-          <p:cNvPr id="4" name="Date Placeholder 3"/>
-          <p:cNvSpPr>
-            <a:spLocks noGrp="1"/>
-          </p:cNvSpPr>
-          <p:nvPr>
-            <p:ph type="dt" sz="half" idx="10"/>
-          </p:nvPr>
-        </p:nvSpPr>
-        <p:spPr/>
-        <p:txBody>
-          <a:bodyPr/>
-          <a:lstStyle/>
-          <a:p>
-            <a:fld id="{F3006E53-7520-4BC9-B0E2-EF98D06B1E4C}" type="datetimeFigureOut">
-              <a:rPr lang="en-US" smtClean="0"/>
-              <a:t>10/17/20 (Sat)</a:t>
-            </a:fld>
-            <a:endParaRPr lang="en-US"/>
-          </a:p>
-        </p:txBody>
-      </p:sp>
-      <p:sp>
-        <p:nvSpPr>
-          <p:cNvPr id="5" name="Footer Placeholder 4"/>
-          <p:cNvSpPr>
-            <a:spLocks noGrp="1"/>
-          </p:cNvSpPr>
-          <p:nvPr>
-            <p:ph type="ftr" sz="quarter" idx="11"/>
-          </p:nvPr>
-        </p:nvSpPr>
-        <p:spPr/>
-        <p:txBody>
-          <a:bodyPr/>
-          <a:lstStyle/>
-          <a:p>
-            <a:endParaRPr lang="en-US"/>
-          </a:p>
-        </p:txBody>
-      </p:sp>
-      <p:sp>
-        <p:nvSpPr>
-          <p:cNvPr id="6" name="Slide Number Placeholder 5"/>
-          <p:cNvSpPr>
-            <a:spLocks noGrp="1"/>
-          </p:cNvSpPr>
-          <p:nvPr>
-            <p:ph type="sldNum" sz="quarter" idx="12"/>
-          </p:nvPr>
-        </p:nvSpPr>
-        <p:spPr/>
-        <p:txBody>
-          <a:bodyPr/>
-          <a:lstStyle/>
-          <a:p>
-            <a:fld id="{DD68DF89-2A9F-4DAC-8D1F-F96BD4021E4B}" type="slidenum">
-              <a:rPr lang="en-US" smtClean="0"/>
-              <a:t>‹#›</a:t>
-            </a:fld>
-            <a:endParaRPr lang="en-US"/>
-          </a:p>
-        </p:txBody>
-      </p:sp>
-    </p:spTree>
-    <p:extLst>
-      <p:ext uri="{BB962C8B-B14F-4D97-AF65-F5344CB8AC3E}">
-        <p14:creationId xmlns:p14="http://schemas.microsoft.com/office/powerpoint/2010/main" val="2711729709"/>
-      </p:ext>
-    </p:extLst>
-  </p:cSld>
-  <p:clrMapOvr>
-    <a:masterClrMapping/>
-  </p:clrMapOvr>
-</p:sldLayout>
-</file>
-
-<file path=ppt/slideLayouts/slideLayout4.xml><?xml version="1.0" encoding="utf-8"?>
-<p:sldLayout xmlns:a="http://schemas.openxmlformats.org/drawingml/2006/main" xmlns:r="http://schemas.openxmlformats.org/officeDocument/2006/relationships" xmlns:p="http://schemas.openxmlformats.org/presentationml/2006/main" type="twoObj" preserve="1">
-  <p:cSld name="Two Content">
-    <p:spTree>
-      <p:nvGrpSpPr>
-        <p:cNvPr id="1" name=""/>
-        <p:cNvGrpSpPr/>
-        <p:nvPr/>
-      </p:nvGrpSpPr>
-      <p:grpSpPr>
-        <a:xfrm>
-          <a:off x="0" y="0"/>
-          <a:ext cx="0" cy="0"/>
-          <a:chOff x="0" y="0"/>
-          <a:chExt cx="0" cy="0"/>
-        </a:xfrm>
-      </p:grpSpPr>
-      <p:sp>
-        <p:nvSpPr>
-          <p:cNvPr id="2" name="Title 1"/>
-          <p:cNvSpPr>
-            <a:spLocks noGrp="1"/>
-          </p:cNvSpPr>
-          <p:nvPr>
-            <p:ph type="title"/>
-          </p:nvPr>
-        </p:nvSpPr>
-        <p:spPr/>
-        <p:txBody>
-          <a:bodyPr/>
-          <a:lstStyle/>
-          <a:p>
-            <a:r>
-              <a:rPr lang="en-US"/>
-              <a:t>Click to edit Master title style</a:t>
-            </a:r>
-            <a:endParaRPr lang="en-US" dirty="0"/>
-          </a:p>
-        </p:txBody>
-      </p:sp>
-      <p:sp>
-        <p:nvSpPr>
-          <p:cNvPr id="3" name="Content Placeholder 2"/>
-          <p:cNvSpPr>
-            <a:spLocks noGrp="1"/>
-          </p:cNvSpPr>
-          <p:nvPr>
-            <p:ph sz="half" idx="1"/>
-          </p:nvPr>
-        </p:nvSpPr>
-        <p:spPr>
-          <a:xfrm>
-            <a:off x="1237545" y="2395710"/>
-            <a:ext cx="7650282" cy="5710124"/>
-          </a:xfrm>
-        </p:spPr>
-        <p:txBody>
-          <a:bodyPr/>
-          <a:lstStyle/>
-          <a:p>
-            <a:pPr lvl="0"/>
-            <a:r>
-              <a:rPr lang="en-US"/>
-              <a:t>Click to edit Master text styles</a:t>
-            </a:r>
-          </a:p>
-          <a:p>
-            <a:pPr lvl="1"/>
-            <a:r>
-              <a:rPr lang="en-US"/>
-              <a:t>Second level</a:t>
-            </a:r>
-          </a:p>
-          <a:p>
-            <a:pPr lvl="2"/>
-            <a:r>
-              <a:rPr lang="en-US"/>
-              <a:t>Third level</a:t>
-            </a:r>
-          </a:p>
-          <a:p>
-            <a:pPr lvl="3"/>
-            <a:r>
-              <a:rPr lang="en-US"/>
-              <a:t>Fourth level</a:t>
-            </a:r>
-          </a:p>
-          <a:p>
-            <a:pPr lvl="4"/>
-            <a:r>
-              <a:rPr lang="en-US"/>
-              <a:t>Fifth level</a:t>
-            </a:r>
-            <a:endParaRPr lang="en-US" dirty="0"/>
-          </a:p>
-        </p:txBody>
-      </p:sp>
-      <p:sp>
-        <p:nvSpPr>
-          <p:cNvPr id="4" name="Content Placeholder 3"/>
-          <p:cNvSpPr>
-            <a:spLocks noGrp="1"/>
-          </p:cNvSpPr>
-          <p:nvPr>
-            <p:ph sz="half" idx="2"/>
-          </p:nvPr>
-        </p:nvSpPr>
-        <p:spPr>
-          <a:xfrm>
-            <a:off x="9112836" y="2395710"/>
-            <a:ext cx="7650282" cy="5710124"/>
-          </a:xfrm>
-        </p:spPr>
-        <p:txBody>
-          <a:bodyPr/>
-          <a:lstStyle/>
-          <a:p>
-            <a:pPr lvl="0"/>
-            <a:r>
-              <a:rPr lang="en-US"/>
-              <a:t>Click to edit Master text styles</a:t>
-            </a:r>
-          </a:p>
-          <a:p>
-            <a:pPr lvl="1"/>
-            <a:r>
-              <a:rPr lang="en-US"/>
-              <a:t>Second level</a:t>
-            </a:r>
-          </a:p>
-          <a:p>
-            <a:pPr lvl="2"/>
-            <a:r>
-              <a:rPr lang="en-US"/>
-              <a:t>Third level</a:t>
-            </a:r>
-          </a:p>
-          <a:p>
-            <a:pPr lvl="3"/>
-            <a:r>
-              <a:rPr lang="en-US"/>
-              <a:t>Fourth level</a:t>
-            </a:r>
-          </a:p>
-          <a:p>
-            <a:pPr lvl="4"/>
-            <a:r>
-              <a:rPr lang="en-US"/>
-              <a:t>Fifth level</a:t>
-            </a:r>
-            <a:endParaRPr lang="en-US" dirty="0"/>
-          </a:p>
-        </p:txBody>
-      </p:sp>
-      <p:sp>
-        <p:nvSpPr>
-          <p:cNvPr id="5" name="Date Placeholder 4"/>
-          <p:cNvSpPr>
-            <a:spLocks noGrp="1"/>
-          </p:cNvSpPr>
-          <p:nvPr>
-            <p:ph type="dt" sz="half" idx="10"/>
-          </p:nvPr>
-        </p:nvSpPr>
-        <p:spPr/>
-        <p:txBody>
-          <a:bodyPr/>
-          <a:lstStyle/>
-          <a:p>
-            <a:fld id="{F3006E53-7520-4BC9-B0E2-EF98D06B1E4C}" type="datetimeFigureOut">
-              <a:rPr lang="en-US" smtClean="0"/>
-              <a:t>10/17/20 (Sat)</a:t>
-            </a:fld>
-            <a:endParaRPr lang="en-US"/>
-          </a:p>
-        </p:txBody>
-      </p:sp>
-      <p:sp>
-        <p:nvSpPr>
-          <p:cNvPr id="6" name="Footer Placeholder 5"/>
-          <p:cNvSpPr>
-            <a:spLocks noGrp="1"/>
-          </p:cNvSpPr>
-          <p:nvPr>
-            <p:ph type="ftr" sz="quarter" idx="11"/>
-          </p:nvPr>
-        </p:nvSpPr>
-        <p:spPr/>
-        <p:txBody>
-          <a:bodyPr/>
-          <a:lstStyle/>
-          <a:p>
-            <a:endParaRPr lang="en-US"/>
-          </a:p>
-        </p:txBody>
-      </p:sp>
-      <p:sp>
-        <p:nvSpPr>
-          <p:cNvPr id="7" name="Slide Number Placeholder 6"/>
-          <p:cNvSpPr>
-            <a:spLocks noGrp="1"/>
-          </p:cNvSpPr>
-          <p:nvPr>
-            <p:ph type="sldNum" sz="quarter" idx="12"/>
-          </p:nvPr>
-        </p:nvSpPr>
-        <p:spPr/>
-        <p:txBody>
-          <a:bodyPr/>
-          <a:lstStyle/>
-          <a:p>
-            <a:fld id="{DD68DF89-2A9F-4DAC-8D1F-F96BD4021E4B}" type="slidenum">
-              <a:rPr lang="en-US" smtClean="0"/>
-              <a:t>‹#›</a:t>
-            </a:fld>
-            <a:endParaRPr lang="en-US"/>
-          </a:p>
-        </p:txBody>
-      </p:sp>
-    </p:spTree>
-    <p:extLst>
-      <p:ext uri="{BB962C8B-B14F-4D97-AF65-F5344CB8AC3E}">
-        <p14:creationId xmlns:p14="http://schemas.microsoft.com/office/powerpoint/2010/main" val="3345352815"/>
-      </p:ext>
-    </p:extLst>
-  </p:cSld>
-  <p:clrMapOvr>
-    <a:masterClrMapping/>
-  </p:clrMapOvr>
-</p:sldLayout>
-</file>
-
-<file path=ppt/slideLayouts/slideLayout5.xml><?xml version="1.0" encoding="utf-8"?>
-<p:sldLayout xmlns:a="http://schemas.openxmlformats.org/drawingml/2006/main" xmlns:r="http://schemas.openxmlformats.org/officeDocument/2006/relationships" xmlns:p="http://schemas.openxmlformats.org/presentationml/2006/main" type="twoTxTwoObj" preserve="1">
-  <p:cSld name="Comparison">
-    <p:spTree>
-      <p:nvGrpSpPr>
-        <p:cNvPr id="1" name=""/>
-        <p:cNvGrpSpPr/>
-        <p:nvPr/>
-      </p:nvGrpSpPr>
-      <p:grpSpPr>
-        <a:xfrm>
-          <a:off x="0" y="0"/>
-          <a:ext cx="0" cy="0"/>
-          <a:chOff x="0" y="0"/>
-          <a:chExt cx="0" cy="0"/>
-        </a:xfrm>
-      </p:grpSpPr>
-      <p:sp>
-        <p:nvSpPr>
-          <p:cNvPr id="2" name="Title 1"/>
-          <p:cNvSpPr>
-            <a:spLocks noGrp="1"/>
-          </p:cNvSpPr>
-          <p:nvPr>
-            <p:ph type="title"/>
-          </p:nvPr>
-        </p:nvSpPr>
-        <p:spPr>
-          <a:xfrm>
-            <a:off x="1239890" y="479143"/>
-            <a:ext cx="15525572" cy="1739495"/>
-          </a:xfrm>
-        </p:spPr>
-        <p:txBody>
-          <a:bodyPr/>
-          <a:lstStyle/>
-          <a:p>
-            <a:r>
-              <a:rPr lang="en-US"/>
-              <a:t>Click to edit Master title style</a:t>
-            </a:r>
-            <a:endParaRPr lang="en-US" dirty="0"/>
-          </a:p>
-        </p:txBody>
-      </p:sp>
-      <p:sp>
-        <p:nvSpPr>
-          <p:cNvPr id="3" name="Text Placeholder 2"/>
-          <p:cNvSpPr>
-            <a:spLocks noGrp="1"/>
-          </p:cNvSpPr>
-          <p:nvPr>
-            <p:ph type="body" idx="1"/>
-          </p:nvPr>
-        </p:nvSpPr>
-        <p:spPr>
-          <a:xfrm>
-            <a:off x="1239891" y="2206137"/>
-            <a:ext cx="7615123" cy="1081194"/>
-          </a:xfrm>
-        </p:spPr>
-        <p:txBody>
-          <a:bodyPr anchor="b"/>
-          <a:lstStyle>
-            <a:lvl1pPr marL="0" indent="0">
-              <a:buNone/>
-              <a:defRPr sz="3150" b="1"/>
-            </a:lvl1pPr>
-            <a:lvl2pPr marL="599984" indent="0">
-              <a:buNone/>
-              <a:defRPr sz="2625" b="1"/>
-            </a:lvl2pPr>
-            <a:lvl3pPr marL="1199967" indent="0">
-              <a:buNone/>
-              <a:defRPr sz="2362" b="1"/>
-            </a:lvl3pPr>
-            <a:lvl4pPr marL="1799951" indent="0">
-              <a:buNone/>
-              <a:defRPr sz="2100" b="1"/>
-            </a:lvl4pPr>
-            <a:lvl5pPr marL="2399934" indent="0">
-              <a:buNone/>
-              <a:defRPr sz="2100" b="1"/>
-            </a:lvl5pPr>
-            <a:lvl6pPr marL="2999918" indent="0">
-              <a:buNone/>
-              <a:defRPr sz="2100" b="1"/>
-            </a:lvl6pPr>
-            <a:lvl7pPr marL="3599901" indent="0">
-              <a:buNone/>
-              <a:defRPr sz="2100" b="1"/>
-            </a:lvl7pPr>
-            <a:lvl8pPr marL="4199885" indent="0">
-              <a:buNone/>
-              <a:defRPr sz="2100" b="1"/>
-            </a:lvl8pPr>
-            <a:lvl9pPr marL="4799868" indent="0">
-              <a:buNone/>
-              <a:defRPr sz="2100" b="1"/>
-            </a:lvl9pPr>
-          </a:lstStyle>
-          <a:p>
-            <a:pPr lvl="0"/>
-            <a:r>
-              <a:rPr lang="en-US"/>
-              <a:t>Click to edit Master text styles</a:t>
-            </a:r>
-          </a:p>
-        </p:txBody>
-      </p:sp>
-      <p:sp>
-        <p:nvSpPr>
-          <p:cNvPr id="4" name="Content Placeholder 3"/>
-          <p:cNvSpPr>
-            <a:spLocks noGrp="1"/>
-          </p:cNvSpPr>
-          <p:nvPr>
-            <p:ph sz="half" idx="2"/>
-          </p:nvPr>
-        </p:nvSpPr>
-        <p:spPr>
-          <a:xfrm>
-            <a:off x="1239891" y="3287331"/>
-            <a:ext cx="7615123" cy="4835169"/>
-          </a:xfrm>
-        </p:spPr>
-        <p:txBody>
-          <a:bodyPr/>
-          <a:lstStyle/>
-          <a:p>
-            <a:pPr lvl="0"/>
-            <a:r>
-              <a:rPr lang="en-US"/>
-              <a:t>Click to edit Master text styles</a:t>
-            </a:r>
-          </a:p>
-          <a:p>
-            <a:pPr lvl="1"/>
-            <a:r>
-              <a:rPr lang="en-US"/>
-              <a:t>Second level</a:t>
-            </a:r>
-          </a:p>
-          <a:p>
-            <a:pPr lvl="2"/>
-            <a:r>
-              <a:rPr lang="en-US"/>
-              <a:t>Third level</a:t>
-            </a:r>
-          </a:p>
-          <a:p>
-            <a:pPr lvl="3"/>
-            <a:r>
-              <a:rPr lang="en-US"/>
-              <a:t>Fourth level</a:t>
-            </a:r>
-          </a:p>
-          <a:p>
-            <a:pPr lvl="4"/>
-            <a:r>
-              <a:rPr lang="en-US"/>
-              <a:t>Fifth level</a:t>
-            </a:r>
-            <a:endParaRPr lang="en-US" dirty="0"/>
-          </a:p>
-        </p:txBody>
-      </p:sp>
-      <p:sp>
-        <p:nvSpPr>
-          <p:cNvPr id="5" name="Text Placeholder 4"/>
-          <p:cNvSpPr>
-            <a:spLocks noGrp="1"/>
-          </p:cNvSpPr>
-          <p:nvPr>
-            <p:ph type="body" sz="quarter" idx="3"/>
-          </p:nvPr>
-        </p:nvSpPr>
-        <p:spPr>
-          <a:xfrm>
-            <a:off x="9112836" y="2206137"/>
-            <a:ext cx="7652626" cy="1081194"/>
-          </a:xfrm>
-        </p:spPr>
-        <p:txBody>
-          <a:bodyPr anchor="b"/>
-          <a:lstStyle>
-            <a:lvl1pPr marL="0" indent="0">
-              <a:buNone/>
-              <a:defRPr sz="3150" b="1"/>
-            </a:lvl1pPr>
-            <a:lvl2pPr marL="599984" indent="0">
-              <a:buNone/>
-              <a:defRPr sz="2625" b="1"/>
-            </a:lvl2pPr>
-            <a:lvl3pPr marL="1199967" indent="0">
-              <a:buNone/>
-              <a:defRPr sz="2362" b="1"/>
-            </a:lvl3pPr>
-            <a:lvl4pPr marL="1799951" indent="0">
-              <a:buNone/>
-              <a:defRPr sz="2100" b="1"/>
-            </a:lvl4pPr>
-            <a:lvl5pPr marL="2399934" indent="0">
-              <a:buNone/>
-              <a:defRPr sz="2100" b="1"/>
-            </a:lvl5pPr>
-            <a:lvl6pPr marL="2999918" indent="0">
-              <a:buNone/>
-              <a:defRPr sz="2100" b="1"/>
-            </a:lvl6pPr>
-            <a:lvl7pPr marL="3599901" indent="0">
-              <a:buNone/>
-              <a:defRPr sz="2100" b="1"/>
-            </a:lvl7pPr>
-            <a:lvl8pPr marL="4199885" indent="0">
-              <a:buNone/>
-              <a:defRPr sz="2100" b="1"/>
-            </a:lvl8pPr>
-            <a:lvl9pPr marL="4799868" indent="0">
-              <a:buNone/>
-              <a:defRPr sz="2100" b="1"/>
-            </a:lvl9pPr>
-          </a:lstStyle>
-          <a:p>
-            <a:pPr lvl="0"/>
-            <a:r>
-              <a:rPr lang="en-US"/>
-              <a:t>Click to edit Master text styles</a:t>
-            </a:r>
-          </a:p>
-        </p:txBody>
-      </p:sp>
-      <p:sp>
-        <p:nvSpPr>
-          <p:cNvPr id="6" name="Content Placeholder 5"/>
-          <p:cNvSpPr>
-            <a:spLocks noGrp="1"/>
-          </p:cNvSpPr>
-          <p:nvPr>
-            <p:ph sz="quarter" idx="4"/>
-          </p:nvPr>
-        </p:nvSpPr>
-        <p:spPr>
-          <a:xfrm>
-            <a:off x="9112836" y="3287331"/>
-            <a:ext cx="7652626" cy="4835169"/>
-          </a:xfrm>
-        </p:spPr>
-        <p:txBody>
-          <a:bodyPr/>
-          <a:lstStyle/>
-          <a:p>
-            <a:pPr lvl="0"/>
-            <a:r>
-              <a:rPr lang="en-US"/>
-              <a:t>Click to edit Master text styles</a:t>
-            </a:r>
-          </a:p>
-          <a:p>
-            <a:pPr lvl="1"/>
-            <a:r>
-              <a:rPr lang="en-US"/>
-              <a:t>Second level</a:t>
-            </a:r>
-          </a:p>
-          <a:p>
-            <a:pPr lvl="2"/>
-            <a:r>
-              <a:rPr lang="en-US"/>
-              <a:t>Third level</a:t>
-            </a:r>
-          </a:p>
-          <a:p>
-            <a:pPr lvl="3"/>
-            <a:r>
-              <a:rPr lang="en-US"/>
-              <a:t>Fourth level</a:t>
-            </a:r>
-          </a:p>
-          <a:p>
-            <a:pPr lvl="4"/>
-            <a:r>
-              <a:rPr lang="en-US"/>
-              <a:t>Fifth level</a:t>
-            </a:r>
-            <a:endParaRPr lang="en-US" dirty="0"/>
-          </a:p>
-        </p:txBody>
-      </p:sp>
-      <p:sp>
-        <p:nvSpPr>
-          <p:cNvPr id="7" name="Date Placeholder 6"/>
-          <p:cNvSpPr>
-            <a:spLocks noGrp="1"/>
-          </p:cNvSpPr>
-          <p:nvPr>
-            <p:ph type="dt" sz="half" idx="10"/>
-          </p:nvPr>
-        </p:nvSpPr>
-        <p:spPr/>
-        <p:txBody>
-          <a:bodyPr/>
-          <a:lstStyle/>
-          <a:p>
-            <a:fld id="{F3006E53-7520-4BC9-B0E2-EF98D06B1E4C}" type="datetimeFigureOut">
-              <a:rPr lang="en-US" smtClean="0"/>
-              <a:t>10/17/20 (Sat)</a:t>
-            </a:fld>
-            <a:endParaRPr lang="en-US"/>
-          </a:p>
-        </p:txBody>
-      </p:sp>
-      <p:sp>
-        <p:nvSpPr>
-          <p:cNvPr id="8" name="Footer Placeholder 7"/>
-          <p:cNvSpPr>
-            <a:spLocks noGrp="1"/>
-          </p:cNvSpPr>
-          <p:nvPr>
-            <p:ph type="ftr" sz="quarter" idx="11"/>
-          </p:nvPr>
-        </p:nvSpPr>
-        <p:spPr/>
-        <p:txBody>
-          <a:bodyPr/>
-          <a:lstStyle/>
-          <a:p>
-            <a:endParaRPr lang="en-US"/>
-          </a:p>
-        </p:txBody>
-      </p:sp>
-      <p:sp>
-        <p:nvSpPr>
-          <p:cNvPr id="9" name="Slide Number Placeholder 8"/>
-          <p:cNvSpPr>
-            <a:spLocks noGrp="1"/>
-          </p:cNvSpPr>
-          <p:nvPr>
-            <p:ph type="sldNum" sz="quarter" idx="12"/>
-          </p:nvPr>
-        </p:nvSpPr>
-        <p:spPr/>
-        <p:txBody>
-          <a:bodyPr/>
-          <a:lstStyle/>
-          <a:p>
-            <a:fld id="{DD68DF89-2A9F-4DAC-8D1F-F96BD4021E4B}" type="slidenum">
-              <a:rPr lang="en-US" smtClean="0"/>
-              <a:t>‹#›</a:t>
-            </a:fld>
-            <a:endParaRPr lang="en-US"/>
-          </a:p>
-        </p:txBody>
-      </p:sp>
-    </p:spTree>
-    <p:extLst>
-      <p:ext uri="{BB962C8B-B14F-4D97-AF65-F5344CB8AC3E}">
-        <p14:creationId xmlns:p14="http://schemas.microsoft.com/office/powerpoint/2010/main" val="3342443843"/>
-      </p:ext>
-    </p:extLst>
-  </p:cSld>
-  <p:clrMapOvr>
-    <a:masterClrMapping/>
-  </p:clrMapOvr>
-</p:sldLayout>
-</file>
-
-<file path=ppt/slideLayouts/slideLayout6.xml><?xml version="1.0" encoding="utf-8"?>
-<p:sldLayout xmlns:a="http://schemas.openxmlformats.org/drawingml/2006/main" xmlns:r="http://schemas.openxmlformats.org/officeDocument/2006/relationships" xmlns:p="http://schemas.openxmlformats.org/presentationml/2006/main" type="titleOnly" preserve="1">
-  <p:cSld name="Title Only">
-    <p:spTree>
-      <p:nvGrpSpPr>
-        <p:cNvPr id="1" name=""/>
-        <p:cNvGrpSpPr/>
-        <p:nvPr/>
-      </p:nvGrpSpPr>
-      <p:grpSpPr>
-        <a:xfrm>
-          <a:off x="0" y="0"/>
-          <a:ext cx="0" cy="0"/>
-          <a:chOff x="0" y="0"/>
-          <a:chExt cx="0" cy="0"/>
-        </a:xfrm>
-      </p:grpSpPr>
-      <p:sp>
-        <p:nvSpPr>
-          <p:cNvPr id="2" name="Title 1"/>
-          <p:cNvSpPr>
-            <a:spLocks noGrp="1"/>
-          </p:cNvSpPr>
-          <p:nvPr>
-            <p:ph type="title"/>
-          </p:nvPr>
-        </p:nvSpPr>
-        <p:spPr/>
-        <p:txBody>
-          <a:bodyPr/>
-          <a:lstStyle/>
-          <a:p>
-            <a:r>
-              <a:rPr lang="en-US"/>
-              <a:t>Click to edit Master title style</a:t>
-            </a:r>
-            <a:endParaRPr lang="en-US" dirty="0"/>
-          </a:p>
-        </p:txBody>
-      </p:sp>
-      <p:sp>
-        <p:nvSpPr>
-          <p:cNvPr id="3" name="Date Placeholder 2"/>
-          <p:cNvSpPr>
-            <a:spLocks noGrp="1"/>
-          </p:cNvSpPr>
-          <p:nvPr>
-            <p:ph type="dt" sz="half" idx="10"/>
-          </p:nvPr>
-        </p:nvSpPr>
-        <p:spPr/>
-        <p:txBody>
-          <a:bodyPr/>
-          <a:lstStyle/>
-          <a:p>
-            <a:fld id="{F3006E53-7520-4BC9-B0E2-EF98D06B1E4C}" type="datetimeFigureOut">
-              <a:rPr lang="en-US" smtClean="0"/>
-              <a:t>10/17/20 (Sat)</a:t>
-            </a:fld>
-            <a:endParaRPr lang="en-US"/>
-          </a:p>
-        </p:txBody>
-      </p:sp>
-      <p:sp>
-        <p:nvSpPr>
-          <p:cNvPr id="4" name="Footer Placeholder 3"/>
-          <p:cNvSpPr>
-            <a:spLocks noGrp="1"/>
-          </p:cNvSpPr>
-          <p:nvPr>
-            <p:ph type="ftr" sz="quarter" idx="11"/>
-          </p:nvPr>
-        </p:nvSpPr>
-        <p:spPr/>
-        <p:txBody>
-          <a:bodyPr/>
-          <a:lstStyle/>
-          <a:p>
-            <a:endParaRPr lang="en-US"/>
-          </a:p>
-        </p:txBody>
-      </p:sp>
-      <p:sp>
-        <p:nvSpPr>
-          <p:cNvPr id="5" name="Slide Number Placeholder 4"/>
-          <p:cNvSpPr>
-            <a:spLocks noGrp="1"/>
-          </p:cNvSpPr>
-          <p:nvPr>
-            <p:ph type="sldNum" sz="quarter" idx="12"/>
-          </p:nvPr>
-        </p:nvSpPr>
-        <p:spPr/>
-        <p:txBody>
-          <a:bodyPr/>
-          <a:lstStyle/>
-          <a:p>
-            <a:fld id="{DD68DF89-2A9F-4DAC-8D1F-F96BD4021E4B}" type="slidenum">
-              <a:rPr lang="en-US" smtClean="0"/>
-              <a:t>‹#›</a:t>
-            </a:fld>
-            <a:endParaRPr lang="en-US"/>
-          </a:p>
-        </p:txBody>
-      </p:sp>
-    </p:spTree>
-    <p:extLst>
-      <p:ext uri="{BB962C8B-B14F-4D97-AF65-F5344CB8AC3E}">
-        <p14:creationId xmlns:p14="http://schemas.microsoft.com/office/powerpoint/2010/main" val="2180490575"/>
-      </p:ext>
-    </p:extLst>
-  </p:cSld>
-  <p:clrMapOvr>
-    <a:masterClrMapping/>
-  </p:clrMapOvr>
-</p:sldLayout>
-</file>
-
-<file path=ppt/slideLayouts/slideLayout7.xml><?xml version="1.0" encoding="utf-8"?>
-<p:sldLayout xmlns:a="http://schemas.openxmlformats.org/drawingml/2006/main" xmlns:r="http://schemas.openxmlformats.org/officeDocument/2006/relationships" xmlns:p="http://schemas.openxmlformats.org/presentationml/2006/main" type="blank" preserve="1">
-  <p:cSld name="Blank">
-    <p:spTree>
-      <p:nvGrpSpPr>
-        <p:cNvPr id="1" name=""/>
-        <p:cNvGrpSpPr/>
-        <p:nvPr/>
-      </p:nvGrpSpPr>
-      <p:grpSpPr>
-        <a:xfrm>
-          <a:off x="0" y="0"/>
-          <a:ext cx="0" cy="0"/>
-          <a:chOff x="0" y="0"/>
-          <a:chExt cx="0" cy="0"/>
-        </a:xfrm>
-      </p:grpSpPr>
-      <p:sp>
-        <p:nvSpPr>
-          <p:cNvPr id="2" name="Date Placeholder 1"/>
-          <p:cNvSpPr>
-            <a:spLocks noGrp="1"/>
-          </p:cNvSpPr>
-          <p:nvPr>
-            <p:ph type="dt" sz="half" idx="10"/>
-          </p:nvPr>
-        </p:nvSpPr>
-        <p:spPr/>
-        <p:txBody>
-          <a:bodyPr/>
-          <a:lstStyle/>
-          <a:p>
-            <a:fld id="{F3006E53-7520-4BC9-B0E2-EF98D06B1E4C}" type="datetimeFigureOut">
-              <a:rPr lang="en-US" smtClean="0"/>
-              <a:t>10/17/20 (Sat)</a:t>
-            </a:fld>
-            <a:endParaRPr lang="en-US"/>
-          </a:p>
-        </p:txBody>
-      </p:sp>
-      <p:sp>
-        <p:nvSpPr>
-          <p:cNvPr id="3" name="Footer Placeholder 2"/>
-          <p:cNvSpPr>
-            <a:spLocks noGrp="1"/>
-          </p:cNvSpPr>
-          <p:nvPr>
-            <p:ph type="ftr" sz="quarter" idx="11"/>
-          </p:nvPr>
-        </p:nvSpPr>
-        <p:spPr/>
-        <p:txBody>
-          <a:bodyPr/>
-          <a:lstStyle/>
-          <a:p>
-            <a:endParaRPr lang="en-US"/>
-          </a:p>
-        </p:txBody>
-      </p:sp>
-      <p:sp>
-        <p:nvSpPr>
-          <p:cNvPr id="4" name="Slide Number Placeholder 3"/>
-          <p:cNvSpPr>
-            <a:spLocks noGrp="1"/>
-          </p:cNvSpPr>
-          <p:nvPr>
-            <p:ph type="sldNum" sz="quarter" idx="12"/>
-          </p:nvPr>
-        </p:nvSpPr>
-        <p:spPr/>
-        <p:txBody>
-          <a:bodyPr/>
-          <a:lstStyle/>
-          <a:p>
-            <a:fld id="{DD68DF89-2A9F-4DAC-8D1F-F96BD4021E4B}" type="slidenum">
-              <a:rPr lang="en-US" smtClean="0"/>
-              <a:t>‹#›</a:t>
-            </a:fld>
-            <a:endParaRPr lang="en-US"/>
-          </a:p>
-        </p:txBody>
-      </p:sp>
-    </p:spTree>
-    <p:extLst>
-      <p:ext uri="{BB962C8B-B14F-4D97-AF65-F5344CB8AC3E}">
-        <p14:creationId xmlns:p14="http://schemas.microsoft.com/office/powerpoint/2010/main" val="3746419306"/>
-      </p:ext>
-    </p:extLst>
-  </p:cSld>
-  <p:clrMapOvr>
-    <a:masterClrMapping/>
-  </p:clrMapOvr>
-</p:sldLayout>
-</file>
-
-<file path=ppt/slideLayouts/slideLayout8.xml><?xml version="1.0" encoding="utf-8"?>
-<p:sldLayout xmlns:a="http://schemas.openxmlformats.org/drawingml/2006/main" xmlns:r="http://schemas.openxmlformats.org/officeDocument/2006/relationships" xmlns:p="http://schemas.openxmlformats.org/presentationml/2006/main" type="objTx" preserve="1">
-  <p:cSld name="Content with Caption">
-    <p:spTree>
-      <p:nvGrpSpPr>
-        <p:cNvPr id="1" name=""/>
-        <p:cNvGrpSpPr/>
-        <p:nvPr/>
-      </p:nvGrpSpPr>
-      <p:grpSpPr>
-        <a:xfrm>
-          <a:off x="0" y="0"/>
-          <a:ext cx="0" cy="0"/>
-          <a:chOff x="0" y="0"/>
-          <a:chExt cx="0" cy="0"/>
-        </a:xfrm>
-      </p:grpSpPr>
-      <p:sp>
-        <p:nvSpPr>
-          <p:cNvPr id="2" name="Title 1"/>
-          <p:cNvSpPr>
-            <a:spLocks noGrp="1"/>
-          </p:cNvSpPr>
-          <p:nvPr>
-            <p:ph type="title"/>
-          </p:nvPr>
-        </p:nvSpPr>
-        <p:spPr>
-          <a:xfrm>
-            <a:off x="1239891" y="599969"/>
-            <a:ext cx="5805682" cy="2099892"/>
-          </a:xfrm>
-        </p:spPr>
-        <p:txBody>
-          <a:bodyPr anchor="b"/>
-          <a:lstStyle>
-            <a:lvl1pPr>
-              <a:defRPr sz="4199"/>
-            </a:lvl1pPr>
-          </a:lstStyle>
-          <a:p>
-            <a:r>
-              <a:rPr lang="en-US"/>
-              <a:t>Click to edit Master title style</a:t>
-            </a:r>
-            <a:endParaRPr lang="en-US" dirty="0"/>
-          </a:p>
-        </p:txBody>
-      </p:sp>
-      <p:sp>
-        <p:nvSpPr>
-          <p:cNvPr id="3" name="Content Placeholder 2"/>
-          <p:cNvSpPr>
-            <a:spLocks noGrp="1"/>
-          </p:cNvSpPr>
-          <p:nvPr>
-            <p:ph idx="1"/>
-          </p:nvPr>
-        </p:nvSpPr>
-        <p:spPr>
-          <a:xfrm>
-            <a:off x="7652626" y="1295767"/>
-            <a:ext cx="9112836" cy="6395505"/>
-          </a:xfrm>
-        </p:spPr>
-        <p:txBody>
-          <a:bodyPr/>
-          <a:lstStyle>
-            <a:lvl1pPr>
-              <a:defRPr sz="4199"/>
-            </a:lvl1pPr>
-            <a:lvl2pPr>
-              <a:defRPr sz="3674"/>
-            </a:lvl2pPr>
-            <a:lvl3pPr>
-              <a:defRPr sz="3150"/>
-            </a:lvl3pPr>
-            <a:lvl4pPr>
-              <a:defRPr sz="2625"/>
-            </a:lvl4pPr>
-            <a:lvl5pPr>
-              <a:defRPr sz="2625"/>
-            </a:lvl5pPr>
-            <a:lvl6pPr>
-              <a:defRPr sz="2625"/>
-            </a:lvl6pPr>
-            <a:lvl7pPr>
-              <a:defRPr sz="2625"/>
-            </a:lvl7pPr>
-            <a:lvl8pPr>
-              <a:defRPr sz="2625"/>
-            </a:lvl8pPr>
-            <a:lvl9pPr>
-              <a:defRPr sz="2625"/>
-            </a:lvl9pPr>
-          </a:lstStyle>
-          <a:p>
-            <a:pPr lvl="0"/>
-            <a:r>
-              <a:rPr lang="en-US"/>
-              <a:t>Click to edit Master text styles</a:t>
-            </a:r>
-          </a:p>
-          <a:p>
-            <a:pPr lvl="1"/>
-            <a:r>
-              <a:rPr lang="en-US"/>
-              <a:t>Second level</a:t>
-            </a:r>
-          </a:p>
-          <a:p>
-            <a:pPr lvl="2"/>
-            <a:r>
-              <a:rPr lang="en-US"/>
-              <a:t>Third level</a:t>
-            </a:r>
-          </a:p>
-          <a:p>
-            <a:pPr lvl="3"/>
-            <a:r>
-              <a:rPr lang="en-US"/>
-              <a:t>Fourth level</a:t>
-            </a:r>
-          </a:p>
-          <a:p>
-            <a:pPr lvl="4"/>
-            <a:r>
-              <a:rPr lang="en-US"/>
-              <a:t>Fifth level</a:t>
-            </a:r>
-            <a:endParaRPr lang="en-US" dirty="0"/>
-          </a:p>
-        </p:txBody>
-      </p:sp>
-      <p:sp>
-        <p:nvSpPr>
-          <p:cNvPr id="4" name="Text Placeholder 3"/>
-          <p:cNvSpPr>
-            <a:spLocks noGrp="1"/>
-          </p:cNvSpPr>
-          <p:nvPr>
-            <p:ph type="body" sz="half" idx="2"/>
-          </p:nvPr>
-        </p:nvSpPr>
-        <p:spPr>
-          <a:xfrm>
-            <a:off x="1239891" y="2699862"/>
-            <a:ext cx="5805682" cy="5001827"/>
-          </a:xfrm>
-        </p:spPr>
-        <p:txBody>
-          <a:bodyPr/>
-          <a:lstStyle>
-            <a:lvl1pPr marL="0" indent="0">
-              <a:buNone/>
-              <a:defRPr sz="2100"/>
-            </a:lvl1pPr>
-            <a:lvl2pPr marL="599984" indent="0">
-              <a:buNone/>
-              <a:defRPr sz="1837"/>
-            </a:lvl2pPr>
-            <a:lvl3pPr marL="1199967" indent="0">
-              <a:buNone/>
-              <a:defRPr sz="1575"/>
-            </a:lvl3pPr>
-            <a:lvl4pPr marL="1799951" indent="0">
-              <a:buNone/>
-              <a:defRPr sz="1312"/>
-            </a:lvl4pPr>
-            <a:lvl5pPr marL="2399934" indent="0">
-              <a:buNone/>
-              <a:defRPr sz="1312"/>
-            </a:lvl5pPr>
-            <a:lvl6pPr marL="2999918" indent="0">
-              <a:buNone/>
-              <a:defRPr sz="1312"/>
-            </a:lvl6pPr>
-            <a:lvl7pPr marL="3599901" indent="0">
-              <a:buNone/>
-              <a:defRPr sz="1312"/>
-            </a:lvl7pPr>
-            <a:lvl8pPr marL="4199885" indent="0">
-              <a:buNone/>
-              <a:defRPr sz="1312"/>
-            </a:lvl8pPr>
-            <a:lvl9pPr marL="4799868" indent="0">
-              <a:buNone/>
-              <a:defRPr sz="1312"/>
-            </a:lvl9pPr>
-          </a:lstStyle>
-          <a:p>
-            <a:pPr lvl="0"/>
-            <a:r>
-              <a:rPr lang="en-US"/>
-              <a:t>Click to edit Master text styles</a:t>
-            </a:r>
-          </a:p>
-        </p:txBody>
-      </p:sp>
-      <p:sp>
-        <p:nvSpPr>
-          <p:cNvPr id="5" name="Date Placeholder 4"/>
-          <p:cNvSpPr>
-            <a:spLocks noGrp="1"/>
-          </p:cNvSpPr>
-          <p:nvPr>
-            <p:ph type="dt" sz="half" idx="10"/>
-          </p:nvPr>
-        </p:nvSpPr>
-        <p:spPr/>
-        <p:txBody>
-          <a:bodyPr/>
-          <a:lstStyle/>
-          <a:p>
-            <a:fld id="{F3006E53-7520-4BC9-B0E2-EF98D06B1E4C}" type="datetimeFigureOut">
-              <a:rPr lang="en-US" smtClean="0"/>
-              <a:t>10/17/20 (Sat)</a:t>
-            </a:fld>
-            <a:endParaRPr lang="en-US"/>
-          </a:p>
-        </p:txBody>
-      </p:sp>
-      <p:sp>
-        <p:nvSpPr>
-          <p:cNvPr id="6" name="Footer Placeholder 5"/>
-          <p:cNvSpPr>
-            <a:spLocks noGrp="1"/>
-          </p:cNvSpPr>
-          <p:nvPr>
-            <p:ph type="ftr" sz="quarter" idx="11"/>
-          </p:nvPr>
-        </p:nvSpPr>
-        <p:spPr/>
-        <p:txBody>
-          <a:bodyPr/>
-          <a:lstStyle/>
-          <a:p>
-            <a:endParaRPr lang="en-US"/>
-          </a:p>
-        </p:txBody>
-      </p:sp>
-      <p:sp>
-        <p:nvSpPr>
-          <p:cNvPr id="7" name="Slide Number Placeholder 6"/>
-          <p:cNvSpPr>
-            <a:spLocks noGrp="1"/>
-          </p:cNvSpPr>
-          <p:nvPr>
-            <p:ph type="sldNum" sz="quarter" idx="12"/>
-          </p:nvPr>
-        </p:nvSpPr>
-        <p:spPr/>
-        <p:txBody>
-          <a:bodyPr/>
-          <a:lstStyle/>
-          <a:p>
-            <a:fld id="{DD68DF89-2A9F-4DAC-8D1F-F96BD4021E4B}" type="slidenum">
-              <a:rPr lang="en-US" smtClean="0"/>
-              <a:t>‹#›</a:t>
-            </a:fld>
-            <a:endParaRPr lang="en-US"/>
-          </a:p>
-        </p:txBody>
-      </p:sp>
-    </p:spTree>
-    <p:extLst>
-      <p:ext uri="{BB962C8B-B14F-4D97-AF65-F5344CB8AC3E}">
-        <p14:creationId xmlns:p14="http://schemas.microsoft.com/office/powerpoint/2010/main" val="435633947"/>
-      </p:ext>
-    </p:extLst>
-  </p:cSld>
-  <p:clrMapOvr>
-    <a:masterClrMapping/>
-  </p:clrMapOvr>
-</p:sldLayout>
-</file>
-
-<file path=ppt/slideLayouts/slideLayout9.xml><?xml version="1.0" encoding="utf-8"?>
-<p:sldLayout xmlns:a="http://schemas.openxmlformats.org/drawingml/2006/main" xmlns:r="http://schemas.openxmlformats.org/officeDocument/2006/relationships" xmlns:p="http://schemas.openxmlformats.org/presentationml/2006/main" type="picTx" preserve="1">
-  <p:cSld name="Picture with Caption">
-    <p:spTree>
-      <p:nvGrpSpPr>
-        <p:cNvPr id="1" name=""/>
-        <p:cNvGrpSpPr/>
-        <p:nvPr/>
-      </p:nvGrpSpPr>
-      <p:grpSpPr>
-        <a:xfrm>
-          <a:off x="0" y="0"/>
-          <a:ext cx="0" cy="0"/>
-          <a:chOff x="0" y="0"/>
-          <a:chExt cx="0" cy="0"/>
-        </a:xfrm>
-      </p:grpSpPr>
-      <p:sp>
-        <p:nvSpPr>
-          <p:cNvPr id="2" name="Title 1"/>
-          <p:cNvSpPr>
-            <a:spLocks noGrp="1"/>
-          </p:cNvSpPr>
-          <p:nvPr>
-            <p:ph type="title"/>
-          </p:nvPr>
-        </p:nvSpPr>
-        <p:spPr>
-          <a:xfrm>
-            <a:off x="1239891" y="599969"/>
-            <a:ext cx="5805682" cy="2099892"/>
-          </a:xfrm>
-        </p:spPr>
-        <p:txBody>
-          <a:bodyPr anchor="b"/>
-          <a:lstStyle>
-            <a:lvl1pPr>
-              <a:defRPr sz="4199"/>
-            </a:lvl1pPr>
-          </a:lstStyle>
-          <a:p>
-            <a:r>
-              <a:rPr lang="en-US"/>
-              <a:t>Click to edit Master title style</a:t>
-            </a:r>
-            <a:endParaRPr lang="en-US" dirty="0"/>
-          </a:p>
-        </p:txBody>
-      </p:sp>
-      <p:sp>
-        <p:nvSpPr>
-          <p:cNvPr id="3" name="Picture Placeholder 2"/>
-          <p:cNvSpPr>
-            <a:spLocks noGrp="1" noChangeAspect="1"/>
-          </p:cNvSpPr>
-          <p:nvPr>
-            <p:ph type="pic" idx="1"/>
-          </p:nvPr>
-        </p:nvSpPr>
-        <p:spPr>
-          <a:xfrm>
-            <a:off x="7652626" y="1295767"/>
-            <a:ext cx="9112836" cy="6395505"/>
-          </a:xfrm>
-        </p:spPr>
-        <p:txBody>
-          <a:bodyPr anchor="t"/>
-          <a:lstStyle>
-            <a:lvl1pPr marL="0" indent="0">
-              <a:buNone/>
-              <a:defRPr sz="4199"/>
-            </a:lvl1pPr>
-            <a:lvl2pPr marL="599984" indent="0">
-              <a:buNone/>
-              <a:defRPr sz="3674"/>
-            </a:lvl2pPr>
-            <a:lvl3pPr marL="1199967" indent="0">
-              <a:buNone/>
-              <a:defRPr sz="3150"/>
-            </a:lvl3pPr>
-            <a:lvl4pPr marL="1799951" indent="0">
-              <a:buNone/>
-              <a:defRPr sz="2625"/>
-            </a:lvl4pPr>
-            <a:lvl5pPr marL="2399934" indent="0">
-              <a:buNone/>
-              <a:defRPr sz="2625"/>
-            </a:lvl5pPr>
-            <a:lvl6pPr marL="2999918" indent="0">
-              <a:buNone/>
-              <a:defRPr sz="2625"/>
-            </a:lvl6pPr>
-            <a:lvl7pPr marL="3599901" indent="0">
-              <a:buNone/>
-              <a:defRPr sz="2625"/>
-            </a:lvl7pPr>
-            <a:lvl8pPr marL="4199885" indent="0">
-              <a:buNone/>
-              <a:defRPr sz="2625"/>
-            </a:lvl8pPr>
-            <a:lvl9pPr marL="4799868" indent="0">
-              <a:buNone/>
-              <a:defRPr sz="2625"/>
-            </a:lvl9pPr>
-          </a:lstStyle>
-          <a:p>
-            <a:r>
-              <a:rPr lang="en-US"/>
-              <a:t>Click icon to add picture</a:t>
-            </a:r>
-            <a:endParaRPr lang="en-US" dirty="0"/>
-          </a:p>
-        </p:txBody>
-      </p:sp>
-      <p:sp>
-        <p:nvSpPr>
-          <p:cNvPr id="4" name="Text Placeholder 3"/>
-          <p:cNvSpPr>
-            <a:spLocks noGrp="1"/>
-          </p:cNvSpPr>
-          <p:nvPr>
-            <p:ph type="body" sz="half" idx="2"/>
-          </p:nvPr>
-        </p:nvSpPr>
-        <p:spPr>
-          <a:xfrm>
-            <a:off x="1239891" y="2699862"/>
-            <a:ext cx="5805682" cy="5001827"/>
-          </a:xfrm>
-        </p:spPr>
-        <p:txBody>
-          <a:bodyPr/>
-          <a:lstStyle>
-            <a:lvl1pPr marL="0" indent="0">
-              <a:buNone/>
-              <a:defRPr sz="2100"/>
-            </a:lvl1pPr>
-            <a:lvl2pPr marL="599984" indent="0">
-              <a:buNone/>
-              <a:defRPr sz="1837"/>
-            </a:lvl2pPr>
-            <a:lvl3pPr marL="1199967" indent="0">
-              <a:buNone/>
-              <a:defRPr sz="1575"/>
-            </a:lvl3pPr>
-            <a:lvl4pPr marL="1799951" indent="0">
-              <a:buNone/>
-              <a:defRPr sz="1312"/>
-            </a:lvl4pPr>
-            <a:lvl5pPr marL="2399934" indent="0">
-              <a:buNone/>
-              <a:defRPr sz="1312"/>
-            </a:lvl5pPr>
-            <a:lvl6pPr marL="2999918" indent="0">
-              <a:buNone/>
-              <a:defRPr sz="1312"/>
-            </a:lvl6pPr>
-            <a:lvl7pPr marL="3599901" indent="0">
-              <a:buNone/>
-              <a:defRPr sz="1312"/>
-            </a:lvl7pPr>
-            <a:lvl8pPr marL="4199885" indent="0">
-              <a:buNone/>
-              <a:defRPr sz="1312"/>
-            </a:lvl8pPr>
-            <a:lvl9pPr marL="4799868" indent="0">
-              <a:buNone/>
-              <a:defRPr sz="1312"/>
-            </a:lvl9pPr>
-          </a:lstStyle>
-          <a:p>
-            <a:pPr lvl="0"/>
-            <a:r>
-              <a:rPr lang="en-US"/>
-              <a:t>Click to edit Master text styles</a:t>
-            </a:r>
-          </a:p>
-        </p:txBody>
-      </p:sp>
-      <p:sp>
-        <p:nvSpPr>
-          <p:cNvPr id="5" name="Date Placeholder 4"/>
-          <p:cNvSpPr>
-            <a:spLocks noGrp="1"/>
-          </p:cNvSpPr>
-          <p:nvPr>
-            <p:ph type="dt" sz="half" idx="10"/>
-          </p:nvPr>
-        </p:nvSpPr>
-        <p:spPr/>
-        <p:txBody>
-          <a:bodyPr/>
-          <a:lstStyle/>
-          <a:p>
-            <a:fld id="{F3006E53-7520-4BC9-B0E2-EF98D06B1E4C}" type="datetimeFigureOut">
-              <a:rPr lang="en-US" smtClean="0"/>
-              <a:t>10/17/20 (Sat)</a:t>
-            </a:fld>
-            <a:endParaRPr lang="en-US"/>
-          </a:p>
-        </p:txBody>
-      </p:sp>
-      <p:sp>
-        <p:nvSpPr>
-          <p:cNvPr id="6" name="Footer Placeholder 5"/>
-          <p:cNvSpPr>
-            <a:spLocks noGrp="1"/>
-          </p:cNvSpPr>
-          <p:nvPr>
-            <p:ph type="ftr" sz="quarter" idx="11"/>
-          </p:nvPr>
-        </p:nvSpPr>
-        <p:spPr/>
-        <p:txBody>
-          <a:bodyPr/>
-          <a:lstStyle/>
-          <a:p>
-            <a:endParaRPr lang="en-US"/>
-          </a:p>
-        </p:txBody>
-      </p:sp>
-      <p:sp>
-        <p:nvSpPr>
-          <p:cNvPr id="7" name="Slide Number Placeholder 6"/>
-          <p:cNvSpPr>
-            <a:spLocks noGrp="1"/>
-          </p:cNvSpPr>
-          <p:nvPr>
-            <p:ph type="sldNum" sz="quarter" idx="12"/>
-          </p:nvPr>
-        </p:nvSpPr>
-        <p:spPr/>
-        <p:txBody>
-          <a:bodyPr/>
-          <a:lstStyle/>
-          <a:p>
-            <a:fld id="{DD68DF89-2A9F-4DAC-8D1F-F96BD4021E4B}" type="slidenum">
-              <a:rPr lang="en-US" smtClean="0"/>
-              <a:t>‹#›</a:t>
-            </a:fld>
-            <a:endParaRPr lang="en-US"/>
-          </a:p>
-        </p:txBody>
-      </p:sp>
-    </p:spTree>
-    <p:extLst>
-      <p:ext uri="{BB962C8B-B14F-4D97-AF65-F5344CB8AC3E}">
-        <p14:creationId xmlns:p14="http://schemas.microsoft.com/office/powerpoint/2010/main" val="524822471"/>
       </p:ext>
     </p:extLst>
   </p:cSld>
@@ -2438,220 +164,6 @@
           <a:chExt cx="0" cy="0"/>
         </a:xfrm>
       </p:grpSpPr>
-      <p:sp>
-        <p:nvSpPr>
-          <p:cNvPr id="2" name="Title Placeholder 1"/>
-          <p:cNvSpPr>
-            <a:spLocks noGrp="1"/>
-          </p:cNvSpPr>
-          <p:nvPr>
-            <p:ph type="title"/>
-          </p:nvPr>
-        </p:nvSpPr>
-        <p:spPr>
-          <a:xfrm>
-            <a:off x="1237546" y="479143"/>
-            <a:ext cx="15525572" cy="1739495"/>
-          </a:xfrm>
-          <a:prstGeom prst="rect">
-            <a:avLst/>
-          </a:prstGeom>
-        </p:spPr>
-        <p:txBody>
-          <a:bodyPr vert="horz" lIns="91440" tIns="45720" rIns="91440" bIns="45720" rtlCol="0" anchor="ctr">
-            <a:normAutofit/>
-          </a:bodyPr>
-          <a:lstStyle/>
-          <a:p>
-            <a:r>
-              <a:rPr lang="en-US"/>
-              <a:t>Click to edit Master title style</a:t>
-            </a:r>
-            <a:endParaRPr lang="en-US" dirty="0"/>
-          </a:p>
-        </p:txBody>
-      </p:sp>
-      <p:sp>
-        <p:nvSpPr>
-          <p:cNvPr id="3" name="Text Placeholder 2"/>
-          <p:cNvSpPr>
-            <a:spLocks noGrp="1"/>
-          </p:cNvSpPr>
-          <p:nvPr>
-            <p:ph type="body" idx="1"/>
-          </p:nvPr>
-        </p:nvSpPr>
-        <p:spPr>
-          <a:xfrm>
-            <a:off x="1237546" y="2395710"/>
-            <a:ext cx="15525572" cy="5710124"/>
-          </a:xfrm>
-          <a:prstGeom prst="rect">
-            <a:avLst/>
-          </a:prstGeom>
-        </p:spPr>
-        <p:txBody>
-          <a:bodyPr vert="horz" lIns="91440" tIns="45720" rIns="91440" bIns="45720" rtlCol="0">
-            <a:normAutofit/>
-          </a:bodyPr>
-          <a:lstStyle/>
-          <a:p>
-            <a:pPr lvl="0"/>
-            <a:r>
-              <a:rPr lang="en-US"/>
-              <a:t>Click to edit Master text styles</a:t>
-            </a:r>
-          </a:p>
-          <a:p>
-            <a:pPr lvl="1"/>
-            <a:r>
-              <a:rPr lang="en-US"/>
-              <a:t>Second level</a:t>
-            </a:r>
-          </a:p>
-          <a:p>
-            <a:pPr lvl="2"/>
-            <a:r>
-              <a:rPr lang="en-US"/>
-              <a:t>Third level</a:t>
-            </a:r>
-          </a:p>
-          <a:p>
-            <a:pPr lvl="3"/>
-            <a:r>
-              <a:rPr lang="en-US"/>
-              <a:t>Fourth level</a:t>
-            </a:r>
-          </a:p>
-          <a:p>
-            <a:pPr lvl="4"/>
-            <a:r>
-              <a:rPr lang="en-US"/>
-              <a:t>Fifth level</a:t>
-            </a:r>
-            <a:endParaRPr lang="en-US" dirty="0"/>
-          </a:p>
-        </p:txBody>
-      </p:sp>
-      <p:sp>
-        <p:nvSpPr>
-          <p:cNvPr id="4" name="Date Placeholder 3"/>
-          <p:cNvSpPr>
-            <a:spLocks noGrp="1"/>
-          </p:cNvSpPr>
-          <p:nvPr>
-            <p:ph type="dt" sz="half" idx="2"/>
-          </p:nvPr>
-        </p:nvSpPr>
-        <p:spPr>
-          <a:xfrm>
-            <a:off x="1237546" y="8341239"/>
-            <a:ext cx="4050149" cy="479142"/>
-          </a:xfrm>
-          <a:prstGeom prst="rect">
-            <a:avLst/>
-          </a:prstGeom>
-        </p:spPr>
-        <p:txBody>
-          <a:bodyPr vert="horz" lIns="91440" tIns="45720" rIns="91440" bIns="45720" rtlCol="0" anchor="ctr"/>
-          <a:lstStyle>
-            <a:lvl1pPr algn="l">
-              <a:defRPr sz="1575">
-                <a:solidFill>
-                  <a:schemeClr val="tx1">
-                    <a:tint val="75000"/>
-                  </a:schemeClr>
-                </a:solidFill>
-              </a:defRPr>
-            </a:lvl1pPr>
-          </a:lstStyle>
-          <a:p>
-            <a:fld id="{F3006E53-7520-4BC9-B0E2-EF98D06B1E4C}" type="datetimeFigureOut">
-              <a:rPr lang="en-US" smtClean="0"/>
-              <a:t>10/17/20 (Sat)</a:t>
-            </a:fld>
-            <a:endParaRPr lang="en-US"/>
-          </a:p>
-        </p:txBody>
-      </p:sp>
-      <p:sp>
-        <p:nvSpPr>
-          <p:cNvPr id="5" name="Footer Placeholder 4"/>
-          <p:cNvSpPr>
-            <a:spLocks noGrp="1"/>
-          </p:cNvSpPr>
-          <p:nvPr>
-            <p:ph type="ftr" sz="quarter" idx="3"/>
-          </p:nvPr>
-        </p:nvSpPr>
-        <p:spPr>
-          <a:xfrm>
-            <a:off x="5962720" y="8341239"/>
-            <a:ext cx="6075224" cy="479142"/>
-          </a:xfrm>
-          <a:prstGeom prst="rect">
-            <a:avLst/>
-          </a:prstGeom>
-        </p:spPr>
-        <p:txBody>
-          <a:bodyPr vert="horz" lIns="91440" tIns="45720" rIns="91440" bIns="45720" rtlCol="0" anchor="ctr"/>
-          <a:lstStyle>
-            <a:lvl1pPr algn="ctr">
-              <a:defRPr sz="1575">
-                <a:solidFill>
-                  <a:schemeClr val="tx1">
-                    <a:tint val="75000"/>
-                  </a:schemeClr>
-                </a:solidFill>
-              </a:defRPr>
-            </a:lvl1pPr>
-          </a:lstStyle>
-          <a:p>
-            <a:endParaRPr lang="en-US"/>
-          </a:p>
-        </p:txBody>
-      </p:sp>
-      <p:sp>
-        <p:nvSpPr>
-          <p:cNvPr id="6" name="Slide Number Placeholder 5"/>
-          <p:cNvSpPr>
-            <a:spLocks noGrp="1"/>
-          </p:cNvSpPr>
-          <p:nvPr>
-            <p:ph type="sldNum" sz="quarter" idx="4"/>
-          </p:nvPr>
-        </p:nvSpPr>
-        <p:spPr>
-          <a:xfrm>
-            <a:off x="12712968" y="8341239"/>
-            <a:ext cx="4050149" cy="479142"/>
-          </a:xfrm>
-          <a:prstGeom prst="rect">
-            <a:avLst/>
-          </a:prstGeom>
-        </p:spPr>
-        <p:txBody>
-          <a:bodyPr vert="horz" lIns="91440" tIns="45720" rIns="91440" bIns="45720" rtlCol="0" anchor="ctr"/>
-          <a:lstStyle>
-            <a:lvl1pPr algn="r">
-              <a:defRPr sz="1575">
-                <a:solidFill>
-                  <a:schemeClr val="tx1">
-                    <a:tint val="75000"/>
-                  </a:schemeClr>
-                </a:solidFill>
-              </a:defRPr>
-            </a:lvl1pPr>
-          </a:lstStyle>
-          <a:p>
-            <a:fld id="{DD68DF89-2A9F-4DAC-8D1F-F96BD4021E4B}" type="slidenum">
-              <a:rPr lang="en-US" smtClean="0"/>
-              <a:t>‹#›</a:t>
-            </a:fld>
-            <a:endParaRPr lang="en-US"/>
-          </a:p>
-        </p:txBody>
-      </p:sp>
     </p:spTree>
     <p:extLst>
       <p:ext uri="{BB962C8B-B14F-4D97-AF65-F5344CB8AC3E}">
@@ -2662,16 +174,6 @@
   <p:clrMap bg1="lt1" tx1="dk1" bg2="lt2" tx2="dk2" accent1="accent1" accent2="accent2" accent3="accent3" accent4="accent4" accent5="accent5" accent6="accent6" hlink="hlink" folHlink="folHlink"/>
   <p:sldLayoutIdLst>
     <p:sldLayoutId id="2147483673" r:id="rId1"/>
-    <p:sldLayoutId id="2147483674" r:id="rId2"/>
-    <p:sldLayoutId id="2147483675" r:id="rId3"/>
-    <p:sldLayoutId id="2147483676" r:id="rId4"/>
-    <p:sldLayoutId id="2147483677" r:id="rId5"/>
-    <p:sldLayoutId id="2147483678" r:id="rId6"/>
-    <p:sldLayoutId id="2147483679" r:id="rId7"/>
-    <p:sldLayoutId id="2147483680" r:id="rId8"/>
-    <p:sldLayoutId id="2147483681" r:id="rId9"/>
-    <p:sldLayoutId id="2147483682" r:id="rId10"/>
-    <p:sldLayoutId id="2147483683" r:id="rId11"/>
   </p:sldLayoutIdLst>
   <p:txStyles>
     <p:titleStyle>
